--- a/fixtures/pptx/notes/input.pptx
+++ b/fixtures/pptx/notes/input.pptx
@@ -194,7 +194,7 @@
           <a:p>
             <a:r>
               <a:rPr lang="en-US" sz="4400"/>
-              <a:t>Slide Title</a:t>
+              <a:t>Slide With Notes</a:t>
             </a:r>
           </a:p>
         </p:txBody>
@@ -217,7 +217,7 @@
           <a:p>
             <a:r>
               <a:rPr lang="en-US" sz="2400"/>
-              <a:t>Content paragraph.</a:t>
+              <a:t>Main content.</a:t>
             </a:r>
           </a:p>
         </p:txBody>
